--- a/SHIBU_P_VITV_ZEROTH_REVIEW.pptx
+++ b/SHIBU_P_VITV_ZEROTH_REVIEW.pptx
@@ -34713,6 +34713,23 @@
                 <a:latin typeface="Times New Roman" panose="02020603050405020304" pitchFamily="18" charset="0"/>
                 <a:cs typeface="Times New Roman" panose="02020603050405020304" pitchFamily="18" charset="0"/>
               </a:rPr>
+              <a:t>Embedding Model: </a:t>
+            </a:r>
+            <a:r>
+              <a:rPr lang="en-IN" sz="8000" dirty="0">
+                <a:latin typeface="Times New Roman" panose="02020603050405020304" pitchFamily="18" charset="0"/>
+                <a:cs typeface="Times New Roman" panose="02020603050405020304" pitchFamily="18" charset="0"/>
+              </a:rPr>
+              <a:t>bge-m3</a:t>
+            </a:r>
+          </a:p>
+          <a:p>
+            <a:pPr lvl="0"/>
+            <a:r>
+              <a:rPr lang="en-IN" sz="8000" b="1" dirty="0">
+                <a:latin typeface="Times New Roman" panose="02020603050405020304" pitchFamily="18" charset="0"/>
+                <a:cs typeface="Times New Roman" panose="02020603050405020304" pitchFamily="18" charset="0"/>
+              </a:rPr>
               <a:t>Knowledge Graph- </a:t>
             </a:r>
             <a:r>
